--- a/python/figs/directory_tree.pptx
+++ b/python/figs/directory_tree.pptx
@@ -5,11 +5,10 @@
     <p:sldMasterId id="2147483648" r:id="rId1"/>
   </p:sldMasterIdLst>
   <p:notesMasterIdLst>
-    <p:notesMasterId r:id="rId4"/>
+    <p:notesMasterId r:id="rId3"/>
   </p:notesMasterIdLst>
   <p:sldIdLst>
-    <p:sldId id="256" r:id="rId2"/>
-    <p:sldId id="257" r:id="rId3"/>
+    <p:sldId id="257" r:id="rId2"/>
   </p:sldIdLst>
   <p:sldSz cx="13004800" cy="9753600"/>
   <p:notesSz cx="6858000" cy="9144000"/>
@@ -311,6 +310,11 @@
       </a:defRPr>
     </a:lvl9pPr>
   </p:defaultTextStyle>
+  <p:extLst>
+    <p:ext uri="{EFAFB233-063F-42B5-8137-9DF3F51BA10A}">
+      <p15:sldGuideLst xmlns:p15="http://schemas.microsoft.com/office/powerpoint/2012/main"/>
+    </p:ext>
+  </p:extLst>
 </p:presentation>
 </file>
 
@@ -498,8 +502,8 @@
 </file>
 
 <file path=ppt/slideLayouts/slideLayout1.xml><?xml version="1.0" encoding="utf-8"?>
-<p:sldLayout xmlns:a="http://schemas.openxmlformats.org/drawingml/2006/main" xmlns:r="http://schemas.openxmlformats.org/officeDocument/2006/relationships" xmlns:p="http://schemas.openxmlformats.org/presentationml/2006/main" type="title">
-  <p:cSld name="タイトル">
+<p:sldLayout xmlns:a="http://schemas.openxmlformats.org/drawingml/2006/main" xmlns:r="http://schemas.openxmlformats.org/officeDocument/2006/relationships" xmlns:p="http://schemas.openxmlformats.org/presentationml/2006/main" type="tx">
+  <p:cSld name="タイトル&amp;画像">
     <p:spTree>
       <p:nvGrpSpPr>
         <p:cNvPr id="1" name=""/>
@@ -516,53 +520,36 @@
       </p:grpSpPr>
       <p:sp>
         <p:nvSpPr>
-          <p:cNvPr id="11" name="作者と日付"/>
-          <p:cNvSpPr txBox="1">
+          <p:cNvPr id="21" name="アボカドとライム"/>
+          <p:cNvSpPr>
             <a:spLocks noGrp="1"/>
           </p:cNvSpPr>
           <p:nvPr>
-            <p:ph type="body" sz="quarter" idx="21" hasCustomPrompt="1"/>
+            <p:ph type="pic" idx="21"/>
           </p:nvPr>
         </p:nvSpPr>
         <p:spPr>
           <a:xfrm>
-            <a:off x="698500" y="8657488"/>
-            <a:ext cx="11607801" cy="461060"/>
+            <a:off x="-376767" y="-915894"/>
+            <a:ext cx="17835652" cy="10682195"/>
           </a:xfrm>
           <a:prstGeom prst="rect">
             <a:avLst/>
           </a:prstGeom>
         </p:spPr>
         <p:txBody>
-          <a:bodyPr anchor="b"/>
-          <a:lstStyle>
-            <a:lvl1pPr marL="0" indent="0" defTabSz="587022">
-              <a:lnSpc>
-                <a:spcPct val="100000"/>
-              </a:lnSpc>
-              <a:spcBef>
-                <a:spcPts val="0"/>
-              </a:spcBef>
-              <a:buSzTx/>
-              <a:buNone/>
-              <a:defRPr sz="2400">
-                <a:latin typeface="+mn-lt"/>
-                <a:ea typeface="+mn-ea"/>
-                <a:cs typeface="+mn-cs"/>
-                <a:sym typeface="ヒラギノ角ゴ ProN W6"/>
-              </a:defRPr>
-            </a:lvl1pPr>
-          </a:lstStyle>
-          <a:p>
-            <a:r>
-              <a:t>作者と日付</a:t>
-            </a:r>
+          <a:bodyPr lIns="91439" tIns="45719" rIns="91439" bIns="45719">
+            <a:noAutofit/>
+          </a:bodyPr>
+          <a:lstStyle/>
+          <a:p>
+            <a:endParaRPr/>
           </a:p>
         </p:txBody>
       </p:sp>
       <p:sp>
         <p:nvSpPr>
-          <p:cNvPr id="12" name="プレゼンテーションのタイトル"/>
+          <p:cNvPr id="22" name="プレゼンテーションのタイトル"/>
           <p:cNvSpPr txBox="1">
             <a:spLocks noGrp="1"/>
           </p:cNvSpPr>
@@ -572,8 +559,8 @@
         </p:nvSpPr>
         <p:spPr>
           <a:xfrm>
-            <a:off x="698500" y="1854200"/>
-            <a:ext cx="11609057" cy="3302000"/>
+            <a:off x="698500" y="5181600"/>
+            <a:ext cx="11607800" cy="3302000"/>
           </a:xfrm>
           <a:prstGeom prst="rect">
             <a:avLst/>
@@ -595,7 +582,7 @@
       </p:sp>
       <p:sp>
         <p:nvSpPr>
-          <p:cNvPr id="13" name="本文レベル1…"/>
+          <p:cNvPr id="23" name="本文レベル1…"/>
           <p:cNvSpPr txBox="1">
             <a:spLocks noGrp="1"/>
           </p:cNvSpPr>
@@ -605,8 +592,8 @@
         </p:nvSpPr>
         <p:spPr>
           <a:xfrm>
-            <a:off x="698500" y="5105400"/>
-            <a:ext cx="11607800" cy="1456399"/>
+            <a:off x="698500" y="8432800"/>
+            <a:ext cx="11607800" cy="689769"/>
           </a:xfrm>
           <a:prstGeom prst="rect">
             <a:avLst/>
@@ -721,99 +708,18 @@
       </p:sp>
       <p:sp>
         <p:nvSpPr>
-          <p:cNvPr id="14" name="スライド番号"/>
+          <p:cNvPr id="24" name="作者と日付"/>
           <p:cNvSpPr txBox="1">
             <a:spLocks noGrp="1"/>
           </p:cNvSpPr>
           <p:nvPr>
-            <p:ph type="sldNum" sz="quarter" idx="2"/>
+            <p:ph type="body" sz="quarter" idx="22" hasCustomPrompt="1"/>
           </p:nvPr>
         </p:nvSpPr>
         <p:spPr>
           <a:xfrm>
-            <a:off x="6336779" y="9234627"/>
-            <a:ext cx="331242" cy="273051"/>
-          </a:xfrm>
-          <a:prstGeom prst="rect">
-            <a:avLst/>
-          </a:prstGeom>
-        </p:spPr>
-        <p:txBody>
-          <a:bodyPr/>
-          <a:lstStyle/>
-          <a:p>
-            <a:fld id="{86CB4B4D-7CA3-9044-876B-883B54F8677D}" type="slidenum">
-              <a:t>‹#›</a:t>
-            </a:fld>
-            <a:endParaRPr/>
-          </a:p>
-        </p:txBody>
-      </p:sp>
-    </p:spTree>
-  </p:cSld>
-  <p:clrMapOvr>
-    <a:masterClrMapping/>
-  </p:clrMapOvr>
-  <p:transition spd="med"/>
-</p:sldLayout>
-</file>
-
-<file path=ppt/slideLayouts/slideLayout10.xml><?xml version="1.0" encoding="utf-8"?>
-<p:sldLayout xmlns:a="http://schemas.openxmlformats.org/drawingml/2006/main" xmlns:r="http://schemas.openxmlformats.org/officeDocument/2006/relationships" xmlns:p="http://schemas.openxmlformats.org/presentationml/2006/main" type="tx">
-  <p:cSld name="タイトルのみ">
-    <p:spTree>
-      <p:nvGrpSpPr>
-        <p:cNvPr id="1" name=""/>
-        <p:cNvGrpSpPr/>
-        <p:nvPr/>
-      </p:nvGrpSpPr>
-      <p:grpSpPr>
-        <a:xfrm>
-          <a:off x="0" y="0"/>
-          <a:ext cx="0" cy="0"/>
-          <a:chOff x="0" y="0"/>
-          <a:chExt cx="0" cy="0"/>
-        </a:xfrm>
-      </p:grpSpPr>
-      <p:sp>
-        <p:nvSpPr>
-          <p:cNvPr id="99" name="スライドのタイトル"/>
-          <p:cNvSpPr txBox="1">
-            <a:spLocks noGrp="1"/>
-          </p:cNvSpPr>
-          <p:nvPr>
-            <p:ph type="title" hasCustomPrompt="1"/>
-          </p:nvPr>
-        </p:nvSpPr>
-        <p:spPr>
-          <a:prstGeom prst="rect">
-            <a:avLst/>
-          </a:prstGeom>
-        </p:spPr>
-        <p:txBody>
-          <a:bodyPr/>
-          <a:lstStyle/>
-          <a:p>
-            <a:r>
-              <a:t>スライドのタイトル</a:t>
-            </a:r>
-          </a:p>
-        </p:txBody>
-      </p:sp>
-      <p:sp>
-        <p:nvSpPr>
-          <p:cNvPr id="100" name="スライドのサブタイトル"/>
-          <p:cNvSpPr txBox="1">
-            <a:spLocks noGrp="1"/>
-          </p:cNvSpPr>
-          <p:nvPr>
-            <p:ph type="body" sz="quarter" idx="21" hasCustomPrompt="1"/>
-          </p:nvPr>
-        </p:nvSpPr>
-        <p:spPr>
-          <a:xfrm>
-            <a:off x="698500" y="1412977"/>
-            <a:ext cx="11607801" cy="671803"/>
+            <a:off x="698500" y="571500"/>
+            <a:ext cx="11607801" cy="461059"/>
           </a:xfrm>
           <a:prstGeom prst="rect">
             <a:avLst/>
@@ -831,7 +737,7 @@
               </a:spcBef>
               <a:buSzTx/>
               <a:buNone/>
-              <a:defRPr sz="3800">
+              <a:defRPr sz="2400">
                 <a:latin typeface="+mn-lt"/>
                 <a:ea typeface="+mn-ea"/>
                 <a:cs typeface="+mn-cs"/>
@@ -841,14 +747,14 @@
           </a:lstStyle>
           <a:p>
             <a:r>
-              <a:t>スライドのサブタイトル</a:t>
+              <a:t>作者と日付</a:t>
             </a:r>
           </a:p>
         </p:txBody>
       </p:sp>
       <p:sp>
         <p:nvSpPr>
-          <p:cNvPr id="101" name="スライド番号"/>
+          <p:cNvPr id="25" name="スライド番号"/>
           <p:cNvSpPr txBox="1">
             <a:spLocks noGrp="1"/>
           </p:cNvSpPr>
@@ -857,6 +763,10 @@
           </p:nvPr>
         </p:nvSpPr>
         <p:spPr>
+          <a:xfrm>
+            <a:off x="6333324" y="9234627"/>
+            <a:ext cx="331243" cy="273051"/>
+          </a:xfrm>
           <a:prstGeom prst="rect">
             <a:avLst/>
           </a:prstGeom>
@@ -881,7 +791,7 @@
 </p:sldLayout>
 </file>
 
-<file path=ppt/slideLayouts/slideLayout11.xml><?xml version="1.0" encoding="utf-8"?>
+<file path=ppt/slideLayouts/slideLayout10.xml><?xml version="1.0" encoding="utf-8"?>
 <p:sldLayout xmlns:a="http://schemas.openxmlformats.org/drawingml/2006/main" xmlns:r="http://schemas.openxmlformats.org/officeDocument/2006/relationships" xmlns:p="http://schemas.openxmlformats.org/presentationml/2006/main" type="tx">
   <p:cSld name="議題">
     <p:spTree>
@@ -1090,7 +1000,7 @@
 </p:sldLayout>
 </file>
 
-<file path=ppt/slideLayouts/slideLayout12.xml><?xml version="1.0" encoding="utf-8"?>
+<file path=ppt/slideLayouts/slideLayout11.xml><?xml version="1.0" encoding="utf-8"?>
 <p:sldLayout xmlns:a="http://schemas.openxmlformats.org/drawingml/2006/main" xmlns:r="http://schemas.openxmlformats.org/officeDocument/2006/relationships" xmlns:p="http://schemas.openxmlformats.org/presentationml/2006/main" type="tx">
   <p:cSld name="ステートメント">
     <p:spTree>
@@ -1243,7 +1153,7 @@
 </p:sldLayout>
 </file>
 
-<file path=ppt/slideLayouts/slideLayout13.xml><?xml version="1.0" encoding="utf-8"?>
+<file path=ppt/slideLayouts/slideLayout12.xml><?xml version="1.0" encoding="utf-8"?>
 <p:sldLayout xmlns:a="http://schemas.openxmlformats.org/drawingml/2006/main" xmlns:r="http://schemas.openxmlformats.org/officeDocument/2006/relationships" xmlns:p="http://schemas.openxmlformats.org/presentationml/2006/main" type="tx">
   <p:cSld name="ビッグファクト">
     <p:spTree>
@@ -1467,7 +1377,7 @@
 </p:sldLayout>
 </file>
 
-<file path=ppt/slideLayouts/slideLayout14.xml><?xml version="1.0" encoding="utf-8"?>
+<file path=ppt/slideLayouts/slideLayout13.xml><?xml version="1.0" encoding="utf-8"?>
 <p:sldLayout xmlns:a="http://schemas.openxmlformats.org/drawingml/2006/main" xmlns:r="http://schemas.openxmlformats.org/officeDocument/2006/relationships" xmlns:p="http://schemas.openxmlformats.org/presentationml/2006/main" type="tx">
   <p:cSld name="引用">
     <p:spTree>
@@ -1651,7 +1561,7 @@
 </p:sldLayout>
 </file>
 
-<file path=ppt/slideLayouts/slideLayout15.xml><?xml version="1.0" encoding="utf-8"?>
+<file path=ppt/slideLayouts/slideLayout14.xml><?xml version="1.0" encoding="utf-8"?>
 <p:sldLayout xmlns:a="http://schemas.openxmlformats.org/drawingml/2006/main" xmlns:r="http://schemas.openxmlformats.org/officeDocument/2006/relationships" xmlns:p="http://schemas.openxmlformats.org/presentationml/2006/main" type="tx">
   <p:cSld name="画像（3点）">
     <p:spTree>
@@ -1790,7 +1700,7 @@
 </p:sldLayout>
 </file>
 
-<file path=ppt/slideLayouts/slideLayout16.xml><?xml version="1.0" encoding="utf-8"?>
+<file path=ppt/slideLayouts/slideLayout15.xml><?xml version="1.0" encoding="utf-8"?>
 <p:sldLayout xmlns:a="http://schemas.openxmlformats.org/drawingml/2006/main" xmlns:r="http://schemas.openxmlformats.org/officeDocument/2006/relationships" xmlns:p="http://schemas.openxmlformats.org/presentationml/2006/main" type="tx">
   <p:cSld name="写真">
     <p:spTree>
@@ -1884,296 +1794,6 @@
 </file>
 
 <file path=ppt/slideLayouts/slideLayout2.xml><?xml version="1.0" encoding="utf-8"?>
-<p:sldLayout xmlns:a="http://schemas.openxmlformats.org/drawingml/2006/main" xmlns:r="http://schemas.openxmlformats.org/officeDocument/2006/relationships" xmlns:p="http://schemas.openxmlformats.org/presentationml/2006/main" type="tx">
-  <p:cSld name="タイトル&amp;画像">
-    <p:spTree>
-      <p:nvGrpSpPr>
-        <p:cNvPr id="1" name=""/>
-        <p:cNvGrpSpPr/>
-        <p:nvPr/>
-      </p:nvGrpSpPr>
-      <p:grpSpPr>
-        <a:xfrm>
-          <a:off x="0" y="0"/>
-          <a:ext cx="0" cy="0"/>
-          <a:chOff x="0" y="0"/>
-          <a:chExt cx="0" cy="0"/>
-        </a:xfrm>
-      </p:grpSpPr>
-      <p:sp>
-        <p:nvSpPr>
-          <p:cNvPr id="21" name="アボカドとライム"/>
-          <p:cNvSpPr>
-            <a:spLocks noGrp="1"/>
-          </p:cNvSpPr>
-          <p:nvPr>
-            <p:ph type="pic" idx="21"/>
-          </p:nvPr>
-        </p:nvSpPr>
-        <p:spPr>
-          <a:xfrm>
-            <a:off x="-376767" y="-915894"/>
-            <a:ext cx="17835652" cy="10682195"/>
-          </a:xfrm>
-          <a:prstGeom prst="rect">
-            <a:avLst/>
-          </a:prstGeom>
-        </p:spPr>
-        <p:txBody>
-          <a:bodyPr lIns="91439" tIns="45719" rIns="91439" bIns="45719">
-            <a:noAutofit/>
-          </a:bodyPr>
-          <a:lstStyle/>
-          <a:p>
-            <a:endParaRPr/>
-          </a:p>
-        </p:txBody>
-      </p:sp>
-      <p:sp>
-        <p:nvSpPr>
-          <p:cNvPr id="22" name="プレゼンテーションのタイトル"/>
-          <p:cNvSpPr txBox="1">
-            <a:spLocks noGrp="1"/>
-          </p:cNvSpPr>
-          <p:nvPr>
-            <p:ph type="title" hasCustomPrompt="1"/>
-          </p:nvPr>
-        </p:nvSpPr>
-        <p:spPr>
-          <a:xfrm>
-            <a:off x="698500" y="5181600"/>
-            <a:ext cx="11607800" cy="3302000"/>
-          </a:xfrm>
-          <a:prstGeom prst="rect">
-            <a:avLst/>
-          </a:prstGeom>
-        </p:spPr>
-        <p:txBody>
-          <a:bodyPr anchor="b"/>
-          <a:lstStyle>
-            <a:lvl1pPr>
-              <a:defRPr sz="8200" spc="-164"/>
-            </a:lvl1pPr>
-          </a:lstStyle>
-          <a:p>
-            <a:r>
-              <a:t>プレゼンテーションのタイトル</a:t>
-            </a:r>
-          </a:p>
-        </p:txBody>
-      </p:sp>
-      <p:sp>
-        <p:nvSpPr>
-          <p:cNvPr id="23" name="本文レベル1…"/>
-          <p:cNvSpPr txBox="1">
-            <a:spLocks noGrp="1"/>
-          </p:cNvSpPr>
-          <p:nvPr>
-            <p:ph type="body" sz="quarter" idx="1" hasCustomPrompt="1"/>
-          </p:nvPr>
-        </p:nvSpPr>
-        <p:spPr>
-          <a:xfrm>
-            <a:off x="698500" y="8432800"/>
-            <a:ext cx="11607800" cy="689769"/>
-          </a:xfrm>
-          <a:prstGeom prst="rect">
-            <a:avLst/>
-          </a:prstGeom>
-        </p:spPr>
-        <p:txBody>
-          <a:bodyPr/>
-          <a:lstStyle>
-            <a:lvl1pPr marL="0" indent="0" defTabSz="587022">
-              <a:lnSpc>
-                <a:spcPct val="100000"/>
-              </a:lnSpc>
-              <a:spcBef>
-                <a:spcPts val="0"/>
-              </a:spcBef>
-              <a:buSzTx/>
-              <a:buNone/>
-              <a:defRPr sz="3800">
-                <a:latin typeface="+mn-lt"/>
-                <a:ea typeface="+mn-ea"/>
-                <a:cs typeface="+mn-cs"/>
-                <a:sym typeface="ヒラギノ角ゴ ProN W6"/>
-              </a:defRPr>
-            </a:lvl1pPr>
-            <a:lvl2pPr marL="0" indent="457200" defTabSz="587022">
-              <a:lnSpc>
-                <a:spcPct val="100000"/>
-              </a:lnSpc>
-              <a:spcBef>
-                <a:spcPts val="0"/>
-              </a:spcBef>
-              <a:buSzTx/>
-              <a:buNone/>
-              <a:defRPr sz="3800">
-                <a:latin typeface="+mn-lt"/>
-                <a:ea typeface="+mn-ea"/>
-                <a:cs typeface="+mn-cs"/>
-                <a:sym typeface="ヒラギノ角ゴ ProN W6"/>
-              </a:defRPr>
-            </a:lvl2pPr>
-            <a:lvl3pPr marL="0" indent="914400" defTabSz="587022">
-              <a:lnSpc>
-                <a:spcPct val="100000"/>
-              </a:lnSpc>
-              <a:spcBef>
-                <a:spcPts val="0"/>
-              </a:spcBef>
-              <a:buSzTx/>
-              <a:buNone/>
-              <a:defRPr sz="3800">
-                <a:latin typeface="+mn-lt"/>
-                <a:ea typeface="+mn-ea"/>
-                <a:cs typeface="+mn-cs"/>
-                <a:sym typeface="ヒラギノ角ゴ ProN W6"/>
-              </a:defRPr>
-            </a:lvl3pPr>
-            <a:lvl4pPr marL="0" indent="1371600" defTabSz="587022">
-              <a:lnSpc>
-                <a:spcPct val="100000"/>
-              </a:lnSpc>
-              <a:spcBef>
-                <a:spcPts val="0"/>
-              </a:spcBef>
-              <a:buSzTx/>
-              <a:buNone/>
-              <a:defRPr sz="3800">
-                <a:latin typeface="+mn-lt"/>
-                <a:ea typeface="+mn-ea"/>
-                <a:cs typeface="+mn-cs"/>
-                <a:sym typeface="ヒラギノ角ゴ ProN W6"/>
-              </a:defRPr>
-            </a:lvl4pPr>
-            <a:lvl5pPr marL="0" indent="1828800" defTabSz="587022">
-              <a:lnSpc>
-                <a:spcPct val="100000"/>
-              </a:lnSpc>
-              <a:spcBef>
-                <a:spcPts val="0"/>
-              </a:spcBef>
-              <a:buSzTx/>
-              <a:buNone/>
-              <a:defRPr sz="3800">
-                <a:latin typeface="+mn-lt"/>
-                <a:ea typeface="+mn-ea"/>
-                <a:cs typeface="+mn-cs"/>
-                <a:sym typeface="ヒラギノ角ゴ ProN W6"/>
-              </a:defRPr>
-            </a:lvl5pPr>
-          </a:lstStyle>
-          <a:p>
-            <a:r>
-              <a:t>プレゼンテーションのサブタイトル</a:t>
-            </a:r>
-          </a:p>
-          <a:p>
-            <a:pPr lvl="1"/>
-            <a:endParaRPr/>
-          </a:p>
-          <a:p>
-            <a:pPr lvl="2"/>
-            <a:endParaRPr/>
-          </a:p>
-          <a:p>
-            <a:pPr lvl="3"/>
-            <a:endParaRPr/>
-          </a:p>
-          <a:p>
-            <a:pPr lvl="4"/>
-            <a:endParaRPr/>
-          </a:p>
-        </p:txBody>
-      </p:sp>
-      <p:sp>
-        <p:nvSpPr>
-          <p:cNvPr id="24" name="作者と日付"/>
-          <p:cNvSpPr txBox="1">
-            <a:spLocks noGrp="1"/>
-          </p:cNvSpPr>
-          <p:nvPr>
-            <p:ph type="body" sz="quarter" idx="22" hasCustomPrompt="1"/>
-          </p:nvPr>
-        </p:nvSpPr>
-        <p:spPr>
-          <a:xfrm>
-            <a:off x="698500" y="571500"/>
-            <a:ext cx="11607801" cy="461059"/>
-          </a:xfrm>
-          <a:prstGeom prst="rect">
-            <a:avLst/>
-          </a:prstGeom>
-        </p:spPr>
-        <p:txBody>
-          <a:bodyPr/>
-          <a:lstStyle>
-            <a:lvl1pPr marL="0" indent="0" defTabSz="587022">
-              <a:lnSpc>
-                <a:spcPct val="100000"/>
-              </a:lnSpc>
-              <a:spcBef>
-                <a:spcPts val="0"/>
-              </a:spcBef>
-              <a:buSzTx/>
-              <a:buNone/>
-              <a:defRPr sz="2400">
-                <a:latin typeface="+mn-lt"/>
-                <a:ea typeface="+mn-ea"/>
-                <a:cs typeface="+mn-cs"/>
-                <a:sym typeface="ヒラギノ角ゴ ProN W6"/>
-              </a:defRPr>
-            </a:lvl1pPr>
-          </a:lstStyle>
-          <a:p>
-            <a:r>
-              <a:t>作者と日付</a:t>
-            </a:r>
-          </a:p>
-        </p:txBody>
-      </p:sp>
-      <p:sp>
-        <p:nvSpPr>
-          <p:cNvPr id="25" name="スライド番号"/>
-          <p:cNvSpPr txBox="1">
-            <a:spLocks noGrp="1"/>
-          </p:cNvSpPr>
-          <p:nvPr>
-            <p:ph type="sldNum" sz="quarter" idx="2"/>
-          </p:nvPr>
-        </p:nvSpPr>
-        <p:spPr>
-          <a:xfrm>
-            <a:off x="6333324" y="9234627"/>
-            <a:ext cx="331243" cy="273051"/>
-          </a:xfrm>
-          <a:prstGeom prst="rect">
-            <a:avLst/>
-          </a:prstGeom>
-        </p:spPr>
-        <p:txBody>
-          <a:bodyPr/>
-          <a:lstStyle/>
-          <a:p>
-            <a:fld id="{86CB4B4D-7CA3-9044-876B-883B54F8677D}" type="slidenum">
-              <a:t>‹#›</a:t>
-            </a:fld>
-            <a:endParaRPr/>
-          </a:p>
-        </p:txBody>
-      </p:sp>
-    </p:spTree>
-  </p:cSld>
-  <p:clrMapOvr>
-    <a:masterClrMapping/>
-  </p:clrMapOvr>
-  <p:transition spd="med"/>
-</p:sldLayout>
-</file>
-
-<file path=ppt/slideLayouts/slideLayout3.xml><?xml version="1.0" encoding="utf-8"?>
 <p:sldLayout xmlns:a="http://schemas.openxmlformats.org/drawingml/2006/main" xmlns:r="http://schemas.openxmlformats.org/officeDocument/2006/relationships" xmlns:p="http://schemas.openxmlformats.org/presentationml/2006/main" type="tx">
   <p:cSld name="タイトル&amp;画像（代替）">
     <p:spTree>
@@ -2409,7 +2029,7 @@
 </p:sldLayout>
 </file>
 
-<file path=ppt/slideLayouts/slideLayout4.xml><?xml version="1.0" encoding="utf-8"?>
+<file path=ppt/slideLayouts/slideLayout3.xml><?xml version="1.0" encoding="utf-8"?>
 <p:sldLayout xmlns:a="http://schemas.openxmlformats.org/drawingml/2006/main" xmlns:r="http://schemas.openxmlformats.org/officeDocument/2006/relationships" xmlns:p="http://schemas.openxmlformats.org/presentationml/2006/main" type="tx">
   <p:cSld name="タイトル&amp;箇条書き">
     <p:spTree>
@@ -2573,7 +2193,7 @@
 </p:sldLayout>
 </file>
 
-<file path=ppt/slideLayouts/slideLayout5.xml><?xml version="1.0" encoding="utf-8"?>
+<file path=ppt/slideLayouts/slideLayout4.xml><?xml version="1.0" encoding="utf-8"?>
 <p:sldLayout xmlns:a="http://schemas.openxmlformats.org/drawingml/2006/main" xmlns:r="http://schemas.openxmlformats.org/officeDocument/2006/relationships" xmlns:p="http://schemas.openxmlformats.org/presentationml/2006/main" type="tx">
   <p:cSld name="箇条書き">
     <p:spTree>
@@ -2666,7 +2286,7 @@
 </p:sldLayout>
 </file>
 
-<file path=ppt/slideLayouts/slideLayout6.xml><?xml version="1.0" encoding="utf-8"?>
+<file path=ppt/slideLayouts/slideLayout5.xml><?xml version="1.0" encoding="utf-8"?>
 <p:sldLayout xmlns:a="http://schemas.openxmlformats.org/drawingml/2006/main" xmlns:r="http://schemas.openxmlformats.org/officeDocument/2006/relationships" xmlns:p="http://schemas.openxmlformats.org/presentationml/2006/main" type="tx">
   <p:cSld name="タイトル、箇条書き、画像">
     <p:spTree>
@@ -2867,7 +2487,7 @@
 </p:sldLayout>
 </file>
 
-<file path=ppt/slideLayouts/slideLayout7.xml><?xml version="1.0" encoding="utf-8"?>
+<file path=ppt/slideLayouts/slideLayout6.xml><?xml version="1.0" encoding="utf-8"?>
 <p:sldLayout xmlns:a="http://schemas.openxmlformats.org/drawingml/2006/main" xmlns:r="http://schemas.openxmlformats.org/officeDocument/2006/relationships" xmlns:p="http://schemas.openxmlformats.org/presentationml/2006/main" type="tx">
   <p:cSld name="タイトル、箇条書き、ライブビデオ（小）">
     <p:spTree>
@@ -3039,7 +2659,7 @@
 </p:sldLayout>
 </file>
 
-<file path=ppt/slideLayouts/slideLayout8.xml><?xml version="1.0" encoding="utf-8"?>
+<file path=ppt/slideLayouts/slideLayout7.xml><?xml version="1.0" encoding="utf-8"?>
 <p:sldLayout xmlns:a="http://schemas.openxmlformats.org/drawingml/2006/main" xmlns:r="http://schemas.openxmlformats.org/officeDocument/2006/relationships" xmlns:p="http://schemas.openxmlformats.org/presentationml/2006/main" type="tx">
   <p:cSld name="タイトル、箇条書き、ライブビデオ（大）">
     <p:spTree>
@@ -3211,7 +2831,7 @@
 </p:sldLayout>
 </file>
 
-<file path=ppt/slideLayouts/slideLayout9.xml><?xml version="1.0" encoding="utf-8"?>
+<file path=ppt/slideLayouts/slideLayout8.xml><?xml version="1.0" encoding="utf-8"?>
 <p:sldLayout xmlns:a="http://schemas.openxmlformats.org/drawingml/2006/main" xmlns:r="http://schemas.openxmlformats.org/officeDocument/2006/relationships" xmlns:p="http://schemas.openxmlformats.org/presentationml/2006/main" type="tx">
   <p:cSld name="セクション">
     <p:spTree>
@@ -3269,6 +2889,129 @@
       <p:sp>
         <p:nvSpPr>
           <p:cNvPr id="92" name="スライド番号"/>
+          <p:cNvSpPr txBox="1">
+            <a:spLocks noGrp="1"/>
+          </p:cNvSpPr>
+          <p:nvPr>
+            <p:ph type="sldNum" sz="quarter" idx="2"/>
+          </p:nvPr>
+        </p:nvSpPr>
+        <p:spPr>
+          <a:prstGeom prst="rect">
+            <a:avLst/>
+          </a:prstGeom>
+        </p:spPr>
+        <p:txBody>
+          <a:bodyPr/>
+          <a:lstStyle/>
+          <a:p>
+            <a:fld id="{86CB4B4D-7CA3-9044-876B-883B54F8677D}" type="slidenum">
+              <a:t>‹#›</a:t>
+            </a:fld>
+            <a:endParaRPr/>
+          </a:p>
+        </p:txBody>
+      </p:sp>
+    </p:spTree>
+  </p:cSld>
+  <p:clrMapOvr>
+    <a:masterClrMapping/>
+  </p:clrMapOvr>
+  <p:transition spd="med"/>
+</p:sldLayout>
+</file>
+
+<file path=ppt/slideLayouts/slideLayout9.xml><?xml version="1.0" encoding="utf-8"?>
+<p:sldLayout xmlns:a="http://schemas.openxmlformats.org/drawingml/2006/main" xmlns:r="http://schemas.openxmlformats.org/officeDocument/2006/relationships" xmlns:p="http://schemas.openxmlformats.org/presentationml/2006/main" type="tx">
+  <p:cSld name="タイトルのみ">
+    <p:spTree>
+      <p:nvGrpSpPr>
+        <p:cNvPr id="1" name=""/>
+        <p:cNvGrpSpPr/>
+        <p:nvPr/>
+      </p:nvGrpSpPr>
+      <p:grpSpPr>
+        <a:xfrm>
+          <a:off x="0" y="0"/>
+          <a:ext cx="0" cy="0"/>
+          <a:chOff x="0" y="0"/>
+          <a:chExt cx="0" cy="0"/>
+        </a:xfrm>
+      </p:grpSpPr>
+      <p:sp>
+        <p:nvSpPr>
+          <p:cNvPr id="99" name="スライドのタイトル"/>
+          <p:cNvSpPr txBox="1">
+            <a:spLocks noGrp="1"/>
+          </p:cNvSpPr>
+          <p:nvPr>
+            <p:ph type="title" hasCustomPrompt="1"/>
+          </p:nvPr>
+        </p:nvSpPr>
+        <p:spPr>
+          <a:prstGeom prst="rect">
+            <a:avLst/>
+          </a:prstGeom>
+        </p:spPr>
+        <p:txBody>
+          <a:bodyPr/>
+          <a:lstStyle/>
+          <a:p>
+            <a:r>
+              <a:t>スライドのタイトル</a:t>
+            </a:r>
+          </a:p>
+        </p:txBody>
+      </p:sp>
+      <p:sp>
+        <p:nvSpPr>
+          <p:cNvPr id="100" name="スライドのサブタイトル"/>
+          <p:cNvSpPr txBox="1">
+            <a:spLocks noGrp="1"/>
+          </p:cNvSpPr>
+          <p:nvPr>
+            <p:ph type="body" sz="quarter" idx="21" hasCustomPrompt="1"/>
+          </p:nvPr>
+        </p:nvSpPr>
+        <p:spPr>
+          <a:xfrm>
+            <a:off x="698500" y="1412977"/>
+            <a:ext cx="11607801" cy="671803"/>
+          </a:xfrm>
+          <a:prstGeom prst="rect">
+            <a:avLst/>
+          </a:prstGeom>
+        </p:spPr>
+        <p:txBody>
+          <a:bodyPr/>
+          <a:lstStyle>
+            <a:lvl1pPr marL="0" indent="0" defTabSz="587022">
+              <a:lnSpc>
+                <a:spcPct val="100000"/>
+              </a:lnSpc>
+              <a:spcBef>
+                <a:spcPts val="0"/>
+              </a:spcBef>
+              <a:buSzTx/>
+              <a:buNone/>
+              <a:defRPr sz="3800">
+                <a:latin typeface="+mn-lt"/>
+                <a:ea typeface="+mn-ea"/>
+                <a:cs typeface="+mn-cs"/>
+                <a:sym typeface="ヒラギノ角ゴ ProN W6"/>
+              </a:defRPr>
+            </a:lvl1pPr>
+          </a:lstStyle>
+          <a:p>
+            <a:r>
+              <a:t>スライドのサブタイトル</a:t>
+            </a:r>
+          </a:p>
+        </p:txBody>
+      </p:sp>
+      <p:sp>
+        <p:nvSpPr>
+          <p:cNvPr id="101" name="スライド番号"/>
           <p:cNvSpPr txBox="1">
             <a:spLocks noGrp="1"/>
           </p:cNvSpPr>
@@ -3349,7 +3092,7 @@
           </a:ln>
           <a:extLst>
             <a:ext uri="{C572A759-6A51-4108-AA02-DFA0A04FC94B}">
-              <ma14:wrappingTextBoxFlag xmlns:ma14="http://schemas.microsoft.com/office/mac/drawingml/2011/main" xmlns:a14="http://schemas.microsoft.com/office/drawing/2010/main" xmlns:m="http://schemas.openxmlformats.org/officeDocument/2006/math" xmlns="" val="1"/>
+              <ma14:wrappingTextBoxFlag xmlns="" xmlns:m="http://schemas.openxmlformats.org/officeDocument/2006/math" xmlns:a14="http://schemas.microsoft.com/office/drawing/2010/main" xmlns:ma14="http://schemas.microsoft.com/office/mac/drawingml/2011/main" val="1"/>
             </a:ext>
           </a:extLst>
         </p:spPr>
@@ -3404,7 +3147,7 @@
           </a:ln>
           <a:extLst>
             <a:ext uri="{C572A759-6A51-4108-AA02-DFA0A04FC94B}">
-              <ma14:wrappingTextBoxFlag xmlns:ma14="http://schemas.microsoft.com/office/mac/drawingml/2011/main" xmlns:a14="http://schemas.microsoft.com/office/drawing/2010/main" xmlns:m="http://schemas.openxmlformats.org/officeDocument/2006/math" xmlns="" val="1"/>
+              <ma14:wrappingTextBoxFlag xmlns="" xmlns:m="http://schemas.openxmlformats.org/officeDocument/2006/math" xmlns:a14="http://schemas.microsoft.com/office/drawing/2010/main" xmlns:ma14="http://schemas.microsoft.com/office/mac/drawingml/2011/main" val="1"/>
             </a:ext>
           </a:extLst>
         </p:spPr>
@@ -3469,22 +3212,21 @@
   </p:cSld>
   <p:clrMap bg1="lt1" tx1="dk1" bg2="lt2" tx2="dk2" accent1="accent1" accent2="accent2" accent3="accent3" accent4="accent4" accent5="accent5" accent6="accent6" hlink="hlink" folHlink="folHlink"/>
   <p:sldLayoutIdLst>
-    <p:sldLayoutId id="2147483649" r:id="rId1"/>
-    <p:sldLayoutId id="2147483650" r:id="rId2"/>
-    <p:sldLayoutId id="2147483651" r:id="rId3"/>
-    <p:sldLayoutId id="2147483652" r:id="rId4"/>
-    <p:sldLayoutId id="2147483653" r:id="rId5"/>
-    <p:sldLayoutId id="2147483654" r:id="rId6"/>
-    <p:sldLayoutId id="2147483655" r:id="rId7"/>
-    <p:sldLayoutId id="2147483656" r:id="rId8"/>
-    <p:sldLayoutId id="2147483657" r:id="rId9"/>
-    <p:sldLayoutId id="2147483658" r:id="rId10"/>
-    <p:sldLayoutId id="2147483659" r:id="rId11"/>
-    <p:sldLayoutId id="2147483660" r:id="rId12"/>
-    <p:sldLayoutId id="2147483661" r:id="rId13"/>
-    <p:sldLayoutId id="2147483662" r:id="rId14"/>
-    <p:sldLayoutId id="2147483663" r:id="rId15"/>
-    <p:sldLayoutId id="2147483664" r:id="rId16"/>
+    <p:sldLayoutId id="2147483650" r:id="rId1"/>
+    <p:sldLayoutId id="2147483651" r:id="rId2"/>
+    <p:sldLayoutId id="2147483652" r:id="rId3"/>
+    <p:sldLayoutId id="2147483653" r:id="rId4"/>
+    <p:sldLayoutId id="2147483654" r:id="rId5"/>
+    <p:sldLayoutId id="2147483655" r:id="rId6"/>
+    <p:sldLayoutId id="2147483656" r:id="rId7"/>
+    <p:sldLayoutId id="2147483657" r:id="rId8"/>
+    <p:sldLayoutId id="2147483658" r:id="rId9"/>
+    <p:sldLayoutId id="2147483659" r:id="rId10"/>
+    <p:sldLayoutId id="2147483660" r:id="rId11"/>
+    <p:sldLayoutId id="2147483661" r:id="rId12"/>
+    <p:sldLayoutId id="2147483662" r:id="rId13"/>
+    <p:sldLayoutId id="2147483663" r:id="rId14"/>
+    <p:sldLayoutId id="2147483664" r:id="rId15"/>
   </p:sldLayoutIdLst>
   <p:transition spd="med"/>
   <p:txStyles>
@@ -4217,114 +3959,6 @@
           <a:chExt cx="0" cy="0"/>
         </a:xfrm>
       </p:grpSpPr>
-      <p:sp>
-        <p:nvSpPr>
-          <p:cNvPr id="2" name="テキスト プレースホルダー 1">
-            <a:extLst>
-              <a:ext uri="{FF2B5EF4-FFF2-40B4-BE49-F238E27FC236}">
-                <a16:creationId xmlns:a16="http://schemas.microsoft.com/office/drawing/2014/main" id="{70640D1D-3958-1495-9E1A-ED8FE1346A60}"/>
-              </a:ext>
-            </a:extLst>
-          </p:cNvPr>
-          <p:cNvSpPr>
-            <a:spLocks noGrp="1"/>
-          </p:cNvSpPr>
-          <p:nvPr>
-            <p:ph type="body" sz="quarter" idx="21"/>
-          </p:nvPr>
-        </p:nvSpPr>
-        <p:spPr/>
-        <p:txBody>
-          <a:bodyPr>
-            <a:normAutofit lnSpcReduction="10000"/>
-          </a:bodyPr>
-          <a:lstStyle/>
-          <a:p>
-            <a:endParaRPr kumimoji="1" lang="ja-JP" altLang="en-US"/>
-          </a:p>
-        </p:txBody>
-      </p:sp>
-      <p:sp>
-        <p:nvSpPr>
-          <p:cNvPr id="3" name="タイトル 2">
-            <a:extLst>
-              <a:ext uri="{FF2B5EF4-FFF2-40B4-BE49-F238E27FC236}">
-                <a16:creationId xmlns:a16="http://schemas.microsoft.com/office/drawing/2014/main" id="{FDB1726B-78FB-4186-A7FE-74A043D3A35A}"/>
-              </a:ext>
-            </a:extLst>
-          </p:cNvPr>
-          <p:cNvSpPr>
-            <a:spLocks noGrp="1"/>
-          </p:cNvSpPr>
-          <p:nvPr>
-            <p:ph type="title"/>
-          </p:nvPr>
-        </p:nvSpPr>
-        <p:spPr/>
-        <p:txBody>
-          <a:bodyPr/>
-          <a:lstStyle/>
-          <a:p>
-            <a:endParaRPr kumimoji="1" lang="ja-JP" altLang="en-US"/>
-          </a:p>
-        </p:txBody>
-      </p:sp>
-      <p:sp>
-        <p:nvSpPr>
-          <p:cNvPr id="4" name="テキスト プレースホルダー 3">
-            <a:extLst>
-              <a:ext uri="{FF2B5EF4-FFF2-40B4-BE49-F238E27FC236}">
-                <a16:creationId xmlns:a16="http://schemas.microsoft.com/office/drawing/2014/main" id="{9DB94320-F207-9362-891A-9EC80A86CBB6}"/>
-              </a:ext>
-            </a:extLst>
-          </p:cNvPr>
-          <p:cNvSpPr>
-            <a:spLocks noGrp="1"/>
-          </p:cNvSpPr>
-          <p:nvPr>
-            <p:ph type="body" sz="quarter" idx="1"/>
-          </p:nvPr>
-        </p:nvSpPr>
-        <p:spPr/>
-        <p:txBody>
-          <a:bodyPr/>
-          <a:lstStyle/>
-          <a:p>
-            <a:endParaRPr kumimoji="1" lang="ja-JP" altLang="en-US"/>
-          </a:p>
-        </p:txBody>
-      </p:sp>
-    </p:spTree>
-    <p:extLst>
-      <p:ext uri="{BB962C8B-B14F-4D97-AF65-F5344CB8AC3E}">
-        <p14:creationId xmlns:p14="http://schemas.microsoft.com/office/powerpoint/2010/main" val="2382812628"/>
-      </p:ext>
-    </p:extLst>
-  </p:cSld>
-  <p:clrMapOvr>
-    <a:masterClrMapping/>
-  </p:clrMapOvr>
-  <p:transition spd="med"/>
-</p:sld>
-</file>
-
-<file path=ppt/slides/slide2.xml><?xml version="1.0" encoding="utf-8"?>
-<p:sld xmlns:a="http://schemas.openxmlformats.org/drawingml/2006/main" xmlns:r="http://schemas.openxmlformats.org/officeDocument/2006/relationships" xmlns:p="http://schemas.openxmlformats.org/presentationml/2006/main">
-  <p:cSld>
-    <p:spTree>
-      <p:nvGrpSpPr>
-        <p:cNvPr id="1" name=""/>
-        <p:cNvGrpSpPr/>
-        <p:nvPr/>
-      </p:nvGrpSpPr>
-      <p:grpSpPr>
-        <a:xfrm>
-          <a:off x="0" y="0"/>
-          <a:ext cx="0" cy="0"/>
-          <a:chOff x="0" y="0"/>
-          <a:chExt cx="0" cy="0"/>
-        </a:xfrm>
-      </p:grpSpPr>
       <p:pic>
         <p:nvPicPr>
           <p:cNvPr id="7" name="図プレースホルダー 3" descr="ダイアグラム&#10;&#10;AI 生成コンテンツは誤りを含む可能性があります。">
